--- a/BookBot-발표자료.pptx
+++ b/BookBot-발표자료.pptx
@@ -4876,50 +4876,35 @@
           </a:p>
         </p:txBody>
       </p:sp>
-      <p:sp>
-        <p:nvSpPr>
-          <p:cNvPr id="17" name="Rectangle 16"/>
-          <p:cNvSpPr/>
-          <p:nvPr/>
-        </p:nvSpPr>
-        <p:spPr>
-          <a:xfrm>
-            <a:off x="6355080" y="960120"/>
-            <a:ext cx="5285232" cy="5230368"/>
-          </a:xfrm>
-          <a:prstGeom prst="rect">
-            <a:avLst/>
-          </a:prstGeom>
-          <a:solidFill>
-            <a:srgbClr val="F4F1E8"/>
-          </a:solidFill>
+      <p:pic>
+        <p:nvPicPr>
+          <p:cNvPr id="17" name="Picture 16" descr="site-shot.png"/>
+          <p:cNvPicPr>
+            <a:picLocks noChangeAspect="1"/>
+          </p:cNvPicPr>
+          <p:nvPr/>
+        </p:nvPicPr>
+        <p:blipFill>
+          <a:blip r:embed="rId2"/>
+          <a:stretch>
+            <a:fillRect/>
+          </a:stretch>
+        </p:blipFill>
+        <p:spPr>
+          <a:xfrm>
+            <a:off x="6355081" y="1481328"/>
+            <a:ext cx="5285230" cy="3403064"/>
+          </a:xfrm>
+          <a:prstGeom prst="rect">
+            <a:avLst/>
+          </a:prstGeom>
           <a:ln w="9525">
             <a:solidFill>
               <a:srgbClr val="C9C0B2"/>
             </a:solidFill>
           </a:ln>
-          <a:effectLst/>
-        </p:spPr>
-        <p:style>
-          <a:lnRef idx="1">
-            <a:schemeClr val="accent1"/>
-          </a:lnRef>
-          <a:fillRef idx="3">
-            <a:schemeClr val="accent1"/>
-          </a:fillRef>
-          <a:effectRef idx="2">
-            <a:schemeClr val="accent1"/>
-          </a:effectRef>
-          <a:fontRef idx="minor">
-            <a:schemeClr val="lt1"/>
-          </a:fontRef>
-        </p:style>
-        <p:txBody>
-          <a:bodyPr rtlCol="0" anchor="ctr"/>
-          <a:lstStyle/>
-          <a:p/>
-        </p:txBody>
-      </p:sp>
+        </p:spPr>
+      </p:pic>
       <p:sp>
         <p:nvSpPr>
           <p:cNvPr id="18" name="TextBox 17"/>
@@ -4928,100 +4913,123 @@
         </p:nvSpPr>
         <p:spPr>
           <a:xfrm>
-            <a:off x="6812280" y="3063240"/>
-            <a:ext cx="4370832" cy="1188720"/>
-          </a:xfrm>
-          <a:prstGeom prst="rect">
-            <a:avLst/>
-          </a:prstGeom>
-          <a:noFill/>
-        </p:spPr>
-        <p:txBody>
-          <a:bodyPr wrap="square" anchor="t" lIns="0" rIns="0" tIns="0" bIns="0">
-            <a:spAutoFit/>
-          </a:bodyPr>
-          <a:lstStyle/>
-          <a:p>
-            <a:pPr algn="ctr">
+            <a:off x="6355080" y="1133856"/>
+            <a:ext cx="5285232" cy="274320"/>
+          </a:xfrm>
+          <a:prstGeom prst="rect">
+            <a:avLst/>
+          </a:prstGeom>
+          <a:noFill/>
+        </p:spPr>
+        <p:txBody>
+          <a:bodyPr wrap="square" anchor="t" lIns="0" rIns="0" tIns="0" bIns="0">
+            <a:spAutoFit/>
+          </a:bodyPr>
+          <a:lstStyle/>
+          <a:p>
+            <a:pPr algn="l">
               <a:lnSpc>
                 <a:spcPct val="125000"/>
               </a:lnSpc>
               <a:spcAft>
-                <a:spcPts val="300"/>
-              </a:spcAft>
-            </a:pPr>
-            <a:r>
-              <a:rPr sz="1300" b="1">
+                <a:spcPts val="600"/>
+              </a:spcAft>
+            </a:pPr>
+            <a:r>
+              <a:rPr sz="1100" b="1">
                 <a:solidFill>
                   <a:srgbClr val="78716A"/>
                 </a:solidFill>
                 <a:latin typeface="Apple SD Gothic Neo"/>
               </a:rPr>
-              <a:t>사이트 화면 캡처 자리</a:t>
-            </a:r>
-          </a:p>
-          <a:p>
-            <a:pPr algn="ctr">
+              <a:t>서비스 첫 화면</a:t>
+            </a:r>
+          </a:p>
+        </p:txBody>
+      </p:sp>
+      <p:sp>
+        <p:nvSpPr>
+          <p:cNvPr id="19" name="TextBox 18"/>
+          <p:cNvSpPr txBox="1"/>
+          <p:nvPr/>
+        </p:nvSpPr>
+        <p:spPr>
+          <a:xfrm>
+            <a:off x="6355080" y="5122136"/>
+            <a:ext cx="5285232" cy="1371600"/>
+          </a:xfrm>
+          <a:prstGeom prst="rect">
+            <a:avLst/>
+          </a:prstGeom>
+          <a:noFill/>
+        </p:spPr>
+        <p:txBody>
+          <a:bodyPr wrap="square" anchor="t" lIns="0" rIns="0" tIns="0" bIns="0">
+            <a:spAutoFit/>
+          </a:bodyPr>
+          <a:lstStyle/>
+          <a:p>
+            <a:pPr algn="l">
               <a:lnSpc>
                 <a:spcPct val="125000"/>
               </a:lnSpc>
               <a:spcAft>
-                <a:spcPts val="300"/>
-              </a:spcAft>
-            </a:pPr>
-            <a:r>
-              <a:rPr sz="600" b="0">
+                <a:spcPts val="400"/>
+              </a:spcAft>
+            </a:pPr>
+            <a:r>
+              <a:rPr sz="1250" b="1">
                 <a:solidFill>
                   <a:srgbClr val="1C1917"/>
                 </a:solidFill>
                 <a:latin typeface="Apple SD Gothic Neo"/>
               </a:rPr>
-              <a:t/>
-            </a:r>
-          </a:p>
-          <a:p>
-            <a:pPr algn="ctr">
+              <a:t>제목 없이 물어도 됩니다</a:t>
+            </a:r>
+          </a:p>
+          <a:p>
+            <a:pPr algn="l">
               <a:lnSpc>
                 <a:spcPct val="125000"/>
               </a:lnSpc>
               <a:spcAft>
-                <a:spcPts val="300"/>
-              </a:spcAft>
-            </a:pPr>
-            <a:r>
-              <a:rPr sz="1000" b="0">
+                <a:spcPts val="400"/>
+              </a:spcAft>
+            </a:pPr>
+            <a:r>
+              <a:rPr sz="1050" b="0">
                 <a:solidFill>
                   <a:srgbClr val="78716A"/>
                 </a:solidFill>
                 <a:latin typeface="Apple SD Gothic Neo"/>
               </a:rPr>
-              <a:t>사이트를 열고 ⌘⇧4 로 캡처해서 docs/site-shot.png 로</a:t>
-            </a:r>
-          </a:p>
-          <a:p>
-            <a:pPr algn="ctr">
+              <a:t>기분 · 상황 · 좋아했던 작가를 말하면 서점과 도서관을 조회해</a:t>
+            </a:r>
+          </a:p>
+          <a:p>
+            <a:pPr algn="l">
               <a:lnSpc>
                 <a:spcPct val="125000"/>
               </a:lnSpc>
               <a:spcAft>
-                <a:spcPts val="300"/>
-              </a:spcAft>
-            </a:pPr>
-            <a:r>
-              <a:rPr sz="1000" b="0">
+                <a:spcPts val="400"/>
+              </a:spcAft>
+            </a:pPr>
+            <a:r>
+              <a:rPr sz="1050" b="0">
                 <a:solidFill>
                   <a:srgbClr val="78716A"/>
                 </a:solidFill>
                 <a:latin typeface="Apple SD Gothic Neo"/>
               </a:rPr>
-              <a:t>저장한 뒤 scripts/make-deck.py 를 다시 실행하세요</a:t>
-            </a:r>
-          </a:p>
-        </p:txBody>
-      </p:sp>
-      <p:sp>
-        <p:nvSpPr>
-          <p:cNvPr id="19" name="TextBox 18"/>
+              <a:t>실제로 존재하는 책만 골라 돌려줍니다.</a:t>
+            </a:r>
+          </a:p>
+        </p:txBody>
+      </p:sp>
+      <p:sp>
+        <p:nvSpPr>
+          <p:cNvPr id="20" name="TextBox 19"/>
           <p:cNvSpPr txBox="1"/>
           <p:nvPr/>
         </p:nvSpPr>
